--- a/test/read/fixtures/multi-theme.pptx
+++ b/test/read/fixtures/multi-theme.pptx
@@ -6,6 +6,7 @@
   </p:sldMasterIdLst>
   <p:sldIdLst>
     <p:sldId id="256" r:id="rId2"/>
+    <p:sldId id="257" r:id="rId3"/>
   </p:sldIdLst>
   <p:sldSz cx="12192000" cy="6858000"/>
   <p:notesSz cx="6858000" cy="9144000"/>
@@ -104,6 +105,11 @@
       </a:defRPr>
     </a:lvl9pPr>
   </p:defaultTextStyle>
+  <p:extLst>
+    <p:ext uri="{EFAFB233-063F-42B5-8137-9DF3F51BA10A}">
+      <p15:sldGuideLst xmlns:p15="http://schemas.microsoft.com/office/powerpoint/2012/main"/>
+    </p:ext>
+  </p:extLst>
 </p:presentation>
 </file>
 
@@ -293,7 +299,7 @@
           <a:p>
             <a:fld id="{A78A0D41-72A1-4697-8545-F47A102596EA}" type="datetimeFigureOut">
               <a:rPr lang="en-US" smtClean="0"/>
-              <a:t>6/18/2026</a:t>
+              <a:t>6/19/2026</a:t>
             </a:fld>
             <a:endParaRPr lang="en-US"/>
           </a:p>
@@ -568,7 +574,7 @@
           <a:p>
             <a:fld id="{A78A0D41-72A1-4697-8545-F47A102596EA}" type="datetimeFigureOut">
               <a:rPr lang="en-US" smtClean="0"/>
-              <a:t>6/18/2026</a:t>
+              <a:t>6/19/2026</a:t>
             </a:fld>
             <a:endParaRPr lang="en-US"/>
           </a:p>
@@ -762,7 +768,7 @@
           <a:p>
             <a:fld id="{A78A0D41-72A1-4697-8545-F47A102596EA}" type="datetimeFigureOut">
               <a:rPr lang="en-US" smtClean="0"/>
-              <a:t>6/18/2026</a:t>
+              <a:t>6/19/2026</a:t>
             </a:fld>
             <a:endParaRPr lang="en-US"/>
           </a:p>
@@ -1035,7 +1041,7 @@
           <a:p>
             <a:fld id="{A78A0D41-72A1-4697-8545-F47A102596EA}" type="datetimeFigureOut">
               <a:rPr lang="en-US" smtClean="0"/>
-              <a:t>6/18/2026</a:t>
+              <a:t>6/19/2026</a:t>
             </a:fld>
             <a:endParaRPr lang="en-US"/>
           </a:p>
@@ -1376,7 +1382,7 @@
           <a:p>
             <a:fld id="{A78A0D41-72A1-4697-8545-F47A102596EA}" type="datetimeFigureOut">
               <a:rPr lang="en-US" smtClean="0"/>
-              <a:t>6/18/2026</a:t>
+              <a:t>6/19/2026</a:t>
             </a:fld>
             <a:endParaRPr lang="en-US"/>
           </a:p>
@@ -1999,7 +2005,7 @@
           <a:p>
             <a:fld id="{A78A0D41-72A1-4697-8545-F47A102596EA}" type="datetimeFigureOut">
               <a:rPr lang="en-US" smtClean="0"/>
-              <a:t>6/18/2026</a:t>
+              <a:t>6/19/2026</a:t>
             </a:fld>
             <a:endParaRPr lang="en-US"/>
           </a:p>
@@ -2859,7 +2865,7 @@
           <a:p>
             <a:fld id="{A78A0D41-72A1-4697-8545-F47A102596EA}" type="datetimeFigureOut">
               <a:rPr lang="en-US" smtClean="0"/>
-              <a:t>6/18/2026</a:t>
+              <a:t>6/19/2026</a:t>
             </a:fld>
             <a:endParaRPr lang="en-US"/>
           </a:p>
@@ -3029,7 +3035,7 @@
           <a:p>
             <a:fld id="{A78A0D41-72A1-4697-8545-F47A102596EA}" type="datetimeFigureOut">
               <a:rPr lang="en-US" smtClean="0"/>
-              <a:t>6/18/2026</a:t>
+              <a:t>6/19/2026</a:t>
             </a:fld>
             <a:endParaRPr lang="en-US"/>
           </a:p>
@@ -3209,7 +3215,7 @@
           <a:p>
             <a:fld id="{A78A0D41-72A1-4697-8545-F47A102596EA}" type="datetimeFigureOut">
               <a:rPr lang="en-US" smtClean="0"/>
-              <a:t>6/18/2026</a:t>
+              <a:t>6/19/2026</a:t>
             </a:fld>
             <a:endParaRPr lang="en-US"/>
           </a:p>
@@ -3261,6 +3267,204 @@
     <p:extLst>
       <p:ext uri="{BB962C8B-B14F-4D97-AF65-F5344CB8AC3E}">
         <p14:creationId xmlns:p14="http://schemas.microsoft.com/office/powerpoint/2010/main" val="3908451562"/>
+      </p:ext>
+    </p:extLst>
+  </p:cSld>
+  <p:clrMapOvr>
+    <a:masterClrMapping/>
+  </p:clrMapOvr>
+</p:sldLayout>
+</file>
+
+<file path=ppt/slideLayouts/slideLayout18.xml><?xml version="1.0" encoding="utf-8"?>
+<p:sldLayout xmlns:a="http://schemas.openxmlformats.org/drawingml/2006/main" xmlns:r="http://schemas.openxmlformats.org/officeDocument/2006/relationships" xmlns:p="http://schemas.openxmlformats.org/presentationml/2006/main" type="tx" preserve="1">
+  <p:cSld name="Title and Text">
+    <p:spTree>
+      <p:nvGrpSpPr>
+        <p:cNvPr id="1" name=""/>
+        <p:cNvGrpSpPr/>
+        <p:nvPr/>
+      </p:nvGrpSpPr>
+      <p:grpSpPr>
+        <a:xfrm>
+          <a:off x="0" y="0"/>
+          <a:ext cx="0" cy="0"/>
+          <a:chOff x="0" y="0"/>
+          <a:chExt cx="0" cy="0"/>
+        </a:xfrm>
+      </p:grpSpPr>
+      <p:sp>
+        <p:nvSpPr>
+          <p:cNvPr id="2" name="Title 1">
+            <a:extLst>
+              <a:ext uri="{FF2B5EF4-FFF2-40B4-BE49-F238E27FC236}">
+                <a16:creationId xmlns:a16="http://schemas.microsoft.com/office/drawing/2014/main" id="{0C04787A-C70F-4A69-FC81-27EA88E65401}"/>
+              </a:ext>
+            </a:extLst>
+          </p:cNvPr>
+          <p:cNvSpPr>
+            <a:spLocks noGrp="1"/>
+          </p:cNvSpPr>
+          <p:nvPr>
+            <p:ph type="title"/>
+          </p:nvPr>
+        </p:nvSpPr>
+        <p:spPr/>
+        <p:txBody>
+          <a:bodyPr/>
+          <a:lstStyle/>
+          <a:p>
+            <a:r>
+              <a:rPr lang="en-US"/>
+              <a:t>Click to edit Master title style</a:t>
+            </a:r>
+          </a:p>
+        </p:txBody>
+      </p:sp>
+      <p:sp>
+        <p:nvSpPr>
+          <p:cNvPr id="3" name="Text Placeholder 2">
+            <a:extLst>
+              <a:ext uri="{FF2B5EF4-FFF2-40B4-BE49-F238E27FC236}">
+                <a16:creationId xmlns:a16="http://schemas.microsoft.com/office/drawing/2014/main" id="{3F68F14C-1330-55CE-E0F8-5C13614DF786}"/>
+              </a:ext>
+            </a:extLst>
+          </p:cNvPr>
+          <p:cNvSpPr>
+            <a:spLocks noGrp="1"/>
+          </p:cNvSpPr>
+          <p:nvPr>
+            <p:ph type="body" idx="1"/>
+          </p:nvPr>
+        </p:nvSpPr>
+        <p:spPr/>
+        <p:txBody>
+          <a:bodyPr/>
+          <a:lstStyle/>
+          <a:p>
+            <a:pPr lvl="0"/>
+            <a:r>
+              <a:rPr lang="en-US"/>
+              <a:t>Click to edit Master text styles</a:t>
+            </a:r>
+          </a:p>
+          <a:p>
+            <a:pPr lvl="1"/>
+            <a:r>
+              <a:rPr lang="en-US"/>
+              <a:t>Second level</a:t>
+            </a:r>
+          </a:p>
+          <a:p>
+            <a:pPr lvl="2"/>
+            <a:r>
+              <a:rPr lang="en-US"/>
+              <a:t>Third level</a:t>
+            </a:r>
+          </a:p>
+          <a:p>
+            <a:pPr lvl="3"/>
+            <a:r>
+              <a:rPr lang="en-US"/>
+              <a:t>Fourth level</a:t>
+            </a:r>
+          </a:p>
+          <a:p>
+            <a:pPr lvl="4"/>
+            <a:r>
+              <a:rPr lang="en-US"/>
+              <a:t>Fifth level</a:t>
+            </a:r>
+          </a:p>
+        </p:txBody>
+      </p:sp>
+      <p:sp>
+        <p:nvSpPr>
+          <p:cNvPr id="4" name="Date Placeholder 3">
+            <a:extLst>
+              <a:ext uri="{FF2B5EF4-FFF2-40B4-BE49-F238E27FC236}">
+                <a16:creationId xmlns:a16="http://schemas.microsoft.com/office/drawing/2014/main" id="{23F40D38-A61E-0A06-5D23-B79F029AC7F0}"/>
+              </a:ext>
+            </a:extLst>
+          </p:cNvPr>
+          <p:cNvSpPr>
+            <a:spLocks noGrp="1"/>
+          </p:cNvSpPr>
+          <p:nvPr>
+            <p:ph type="dt" sz="half" idx="10"/>
+          </p:nvPr>
+        </p:nvSpPr>
+        <p:spPr/>
+        <p:txBody>
+          <a:bodyPr/>
+          <a:lstStyle/>
+          <a:p>
+            <a:fld id="{A78A0D41-72A1-4697-8545-F47A102596EA}" type="datetimeFigureOut">
+              <a:rPr lang="en-US" smtClean="0"/>
+              <a:t>6/19/2026</a:t>
+            </a:fld>
+            <a:endParaRPr lang="en-US"/>
+          </a:p>
+        </p:txBody>
+      </p:sp>
+      <p:sp>
+        <p:nvSpPr>
+          <p:cNvPr id="5" name="Footer Placeholder 4">
+            <a:extLst>
+              <a:ext uri="{FF2B5EF4-FFF2-40B4-BE49-F238E27FC236}">
+                <a16:creationId xmlns:a16="http://schemas.microsoft.com/office/drawing/2014/main" id="{7098DAA1-9868-8987-D40D-DD16AFA5B966}"/>
+              </a:ext>
+            </a:extLst>
+          </p:cNvPr>
+          <p:cNvSpPr>
+            <a:spLocks noGrp="1"/>
+          </p:cNvSpPr>
+          <p:nvPr>
+            <p:ph type="ftr" sz="quarter" idx="11"/>
+          </p:nvPr>
+        </p:nvSpPr>
+        <p:spPr/>
+        <p:txBody>
+          <a:bodyPr/>
+          <a:lstStyle/>
+          <a:p>
+            <a:endParaRPr lang="en-US"/>
+          </a:p>
+        </p:txBody>
+      </p:sp>
+      <p:sp>
+        <p:nvSpPr>
+          <p:cNvPr id="6" name="Slide Number Placeholder 5">
+            <a:extLst>
+              <a:ext uri="{FF2B5EF4-FFF2-40B4-BE49-F238E27FC236}">
+                <a16:creationId xmlns:a16="http://schemas.microsoft.com/office/drawing/2014/main" id="{074F6604-C591-1757-AC7E-ECF1FCA9A762}"/>
+              </a:ext>
+            </a:extLst>
+          </p:cNvPr>
+          <p:cNvSpPr>
+            <a:spLocks noGrp="1"/>
+          </p:cNvSpPr>
+          <p:nvPr>
+            <p:ph type="sldNum" sz="quarter" idx="12"/>
+          </p:nvPr>
+        </p:nvSpPr>
+        <p:spPr/>
+        <p:txBody>
+          <a:bodyPr/>
+          <a:lstStyle/>
+          <a:p>
+            <a:fld id="{1FD0E560-E594-4244-BB06-22B45FBAE477}" type="slidenum">
+              <a:rPr lang="en-US" smtClean="0"/>
+              <a:t>‹#›</a:t>
+            </a:fld>
+            <a:endParaRPr lang="en-US"/>
+          </a:p>
+        </p:txBody>
+      </p:sp>
+    </p:spTree>
+    <p:extLst>
+      <p:ext uri="{BB962C8B-B14F-4D97-AF65-F5344CB8AC3E}">
+        <p14:creationId xmlns:p14="http://schemas.microsoft.com/office/powerpoint/2010/main" val="485509781"/>
       </p:ext>
     </p:extLst>
   </p:cSld>
@@ -3379,7 +3583,7 @@
           <a:p>
             <a:fld id="{A78A0D41-72A1-4697-8545-F47A102596EA}" type="datetimeFigureOut">
               <a:rPr lang="en-US" smtClean="0"/>
-              <a:t>6/18/2026</a:t>
+              <a:t>6/19/2026</a:t>
             </a:fld>
             <a:endParaRPr lang="en-US"/>
           </a:p>
@@ -3626,7 +3830,7 @@
           <a:p>
             <a:fld id="{A78A0D41-72A1-4697-8545-F47A102596EA}" type="datetimeFigureOut">
               <a:rPr lang="en-US" smtClean="0"/>
-              <a:t>6/18/2026</a:t>
+              <a:t>6/19/2026</a:t>
             </a:fld>
             <a:endParaRPr lang="en-US"/>
           </a:p>
@@ -3918,7 +4122,7 @@
           <a:p>
             <a:fld id="{A78A0D41-72A1-4697-8545-F47A102596EA}" type="datetimeFigureOut">
               <a:rPr lang="en-US" smtClean="0"/>
-              <a:t>6/18/2026</a:t>
+              <a:t>6/19/2026</a:t>
             </a:fld>
             <a:endParaRPr lang="en-US"/>
           </a:p>
@@ -4362,7 +4566,7 @@
           <a:p>
             <a:fld id="{A78A0D41-72A1-4697-8545-F47A102596EA}" type="datetimeFigureOut">
               <a:rPr lang="en-US" smtClean="0"/>
-              <a:t>6/18/2026</a:t>
+              <a:t>6/19/2026</a:t>
             </a:fld>
             <a:endParaRPr lang="en-US"/>
           </a:p>
@@ -4480,7 +4684,7 @@
           <a:p>
             <a:fld id="{A78A0D41-72A1-4697-8545-F47A102596EA}" type="datetimeFigureOut">
               <a:rPr lang="en-US" smtClean="0"/>
-              <a:t>6/18/2026</a:t>
+              <a:t>6/19/2026</a:t>
             </a:fld>
             <a:endParaRPr lang="en-US"/>
           </a:p>
@@ -4575,7 +4779,7 @@
           <a:p>
             <a:fld id="{A78A0D41-72A1-4697-8545-F47A102596EA}" type="datetimeFigureOut">
               <a:rPr lang="en-US" smtClean="0"/>
-              <a:t>6/18/2026</a:t>
+              <a:t>6/19/2026</a:t>
             </a:fld>
             <a:endParaRPr lang="en-US"/>
           </a:p>
@@ -4854,7 +5058,7 @@
           <a:p>
             <a:fld id="{A78A0D41-72A1-4697-8545-F47A102596EA}" type="datetimeFigureOut">
               <a:rPr lang="en-US" smtClean="0"/>
-              <a:t>6/18/2026</a:t>
+              <a:t>6/19/2026</a:t>
             </a:fld>
             <a:endParaRPr lang="en-US"/>
           </a:p>
@@ -5129,7 +5333,7 @@
           <a:p>
             <a:fld id="{A78A0D41-72A1-4697-8545-F47A102596EA}" type="datetimeFigureOut">
               <a:rPr lang="en-US" smtClean="0"/>
-              <a:t>6/18/2026</a:t>
+              <a:t>6/19/2026</a:t>
             </a:fld>
             <a:endParaRPr lang="en-US"/>
           </a:p>
@@ -5221,7 +5425,7 @@
           <p:nvPr/>
         </p:nvPicPr>
         <p:blipFill rotWithShape="1">
-          <a:blip r:embed="rId19">
+          <a:blip r:embed="rId20">
             <a:extLst>
               <a:ext uri="{28A0092B-C50C-407E-A947-70E740481C1C}">
                 <a14:useLocalDpi xmlns:a14="http://schemas.microsoft.com/office/drawing/2010/main" val="0"/>
@@ -5250,7 +5454,7 @@
           <p:nvPr/>
         </p:nvPicPr>
         <p:blipFill rotWithShape="1">
-          <a:blip r:embed="rId20">
+          <a:blip r:embed="rId21">
             <a:extLst>
               <a:ext uri="{28A0092B-C50C-407E-A947-70E740481C1C}">
                 <a14:useLocalDpi xmlns:a14="http://schemas.microsoft.com/office/drawing/2010/main" val="0"/>
@@ -5342,7 +5546,7 @@
           <p:nvPr/>
         </p:nvPicPr>
         <p:blipFill rotWithShape="1">
-          <a:blip r:embed="rId21">
+          <a:blip r:embed="rId22">
             <a:extLst>
               <a:ext uri="{28A0092B-C50C-407E-A947-70E740481C1C}">
                 <a14:useLocalDpi xmlns:a14="http://schemas.microsoft.com/office/drawing/2010/main" val="0"/>
@@ -5371,7 +5575,7 @@
           <p:nvPr/>
         </p:nvPicPr>
         <p:blipFill rotWithShape="1">
-          <a:blip r:embed="rId22">
+          <a:blip r:embed="rId23">
             <a:extLst>
               <a:ext uri="{28A0092B-C50C-407E-A947-70E740481C1C}">
                 <a14:useLocalDpi xmlns:a14="http://schemas.microsoft.com/office/drawing/2010/main" val="0"/>
@@ -5558,7 +5762,7 @@
           <a:p>
             <a:fld id="{A78A0D41-72A1-4697-8545-F47A102596EA}" type="datetimeFigureOut">
               <a:rPr lang="en-US" smtClean="0"/>
-              <a:t>6/18/2026</a:t>
+              <a:t>6/19/2026</a:t>
             </a:fld>
             <a:endParaRPr lang="en-US"/>
           </a:p>
@@ -5669,6 +5873,7 @@
     <p:sldLayoutId id="2147483675" r:id="rId15"/>
     <p:sldLayoutId id="2147483676" r:id="rId16"/>
     <p:sldLayoutId id="2147483677" r:id="rId17"/>
+    <p:sldLayoutId id="2147483678" r:id="rId18"/>
   </p:sldLayoutIdLst>
   <p:txStyles>
     <p:titleStyle>
@@ -6304,6 +6509,96 @@
 </p:sld>
 </file>
 
+<file path=ppt/slides/slide2.xml><?xml version="1.0" encoding="utf-8"?>
+<p:sld xmlns:a="http://schemas.openxmlformats.org/drawingml/2006/main" xmlns:r="http://schemas.openxmlformats.org/officeDocument/2006/relationships" xmlns:p="http://schemas.openxmlformats.org/presentationml/2006/main">
+  <p:cSld>
+    <p:spTree>
+      <p:nvGrpSpPr>
+        <p:cNvPr id="1" name=""/>
+        <p:cNvGrpSpPr/>
+        <p:nvPr/>
+      </p:nvGrpSpPr>
+      <p:grpSpPr>
+        <a:xfrm>
+          <a:off x="0" y="0"/>
+          <a:ext cx="0" cy="0"/>
+          <a:chOff x="0" y="0"/>
+          <a:chExt cx="0" cy="0"/>
+        </a:xfrm>
+      </p:grpSpPr>
+      <p:sp>
+        <p:nvSpPr>
+          <p:cNvPr id="2" name="inherited-title">
+            <a:extLst>
+              <a:ext uri="{FF2B5EF4-FFF2-40B4-BE49-F238E27FC236}">
+                <a16:creationId xmlns:a16="http://schemas.microsoft.com/office/drawing/2014/main" id="{444B94B4-2DF6-86B8-D76A-D6E935C37736}"/>
+              </a:ext>
+            </a:extLst>
+          </p:cNvPr>
+          <p:cNvSpPr>
+            <a:spLocks noGrp="1"/>
+          </p:cNvSpPr>
+          <p:nvPr>
+            <p:ph type="title"/>
+          </p:nvPr>
+        </p:nvSpPr>
+        <p:spPr/>
+        <p:txBody>
+          <a:bodyPr/>
+          <a:lstStyle/>
+          <a:p>
+            <a:r>
+              <a:rPr lang="en-US"/>
+              <a:t>Inherited title color</a:t>
+            </a:r>
+          </a:p>
+        </p:txBody>
+      </p:sp>
+      <p:sp>
+        <p:nvSpPr>
+          <p:cNvPr id="3" name="explicit-body">
+            <a:extLst>
+              <a:ext uri="{FF2B5EF4-FFF2-40B4-BE49-F238E27FC236}">
+                <a16:creationId xmlns:a16="http://schemas.microsoft.com/office/drawing/2014/main" id="{2686A62E-E162-6C24-71E0-2B279E7A367A}"/>
+              </a:ext>
+            </a:extLst>
+          </p:cNvPr>
+          <p:cNvSpPr>
+            <a:spLocks noGrp="1"/>
+          </p:cNvSpPr>
+          <p:nvPr>
+            <p:ph type="body" idx="1"/>
+          </p:nvPr>
+        </p:nvSpPr>
+        <p:spPr/>
+        <p:txBody>
+          <a:bodyPr/>
+          <a:lstStyle/>
+          <a:p>
+            <a:r>
+              <a:rPr lang="en-US">
+                <a:solidFill>
+                  <a:srgbClr val="FF00FF"/>
+                </a:solidFill>
+              </a:rPr>
+              <a:t>Explicit color body</a:t>
+            </a:r>
+          </a:p>
+        </p:txBody>
+      </p:sp>
+    </p:spTree>
+    <p:extLst>
+      <p:ext uri="{BB962C8B-B14F-4D97-AF65-F5344CB8AC3E}">
+        <p14:creationId xmlns:p14="http://schemas.microsoft.com/office/powerpoint/2010/main" val="675923469"/>
+      </p:ext>
+    </p:extLst>
+  </p:cSld>
+  <p:clrMapOvr>
+    <a:masterClrMapping/>
+  </p:clrMapOvr>
+</p:sld>
+</file>
+
 <file path=ppt/theme/theme1.xml><?xml version="1.0" encoding="utf-8"?>
 <a:theme xmlns:a="http://schemas.openxmlformats.org/drawingml/2006/main" name="Ion">
   <a:themeElements>

--- a/test/read/fixtures/multi-theme.pptx
+++ b/test/read/fixtures/multi-theme.pptx
@@ -7,6 +7,7 @@
   <p:sldIdLst>
     <p:sldId id="256" r:id="rId2"/>
     <p:sldId id="257" r:id="rId3"/>
+    <p:sldId id="258" r:id="rId4"/>
   </p:sldIdLst>
   <p:sldSz cx="12192000" cy="6858000"/>
   <p:notesSz cx="6858000" cy="9144000"/>
@@ -299,7 +300,7 @@
           <a:p>
             <a:fld id="{A78A0D41-72A1-4697-8545-F47A102596EA}" type="datetimeFigureOut">
               <a:rPr lang="en-US" smtClean="0"/>
-              <a:t>6/19/2026</a:t>
+              <a:t>6/24/2026</a:t>
             </a:fld>
             <a:endParaRPr lang="en-US"/>
           </a:p>
@@ -574,7 +575,7 @@
           <a:p>
             <a:fld id="{A78A0D41-72A1-4697-8545-F47A102596EA}" type="datetimeFigureOut">
               <a:rPr lang="en-US" smtClean="0"/>
-              <a:t>6/19/2026</a:t>
+              <a:t>6/24/2026</a:t>
             </a:fld>
             <a:endParaRPr lang="en-US"/>
           </a:p>
@@ -768,7 +769,7 @@
           <a:p>
             <a:fld id="{A78A0D41-72A1-4697-8545-F47A102596EA}" type="datetimeFigureOut">
               <a:rPr lang="en-US" smtClean="0"/>
-              <a:t>6/19/2026</a:t>
+              <a:t>6/24/2026</a:t>
             </a:fld>
             <a:endParaRPr lang="en-US"/>
           </a:p>
@@ -1041,7 +1042,7 @@
           <a:p>
             <a:fld id="{A78A0D41-72A1-4697-8545-F47A102596EA}" type="datetimeFigureOut">
               <a:rPr lang="en-US" smtClean="0"/>
-              <a:t>6/19/2026</a:t>
+              <a:t>6/24/2026</a:t>
             </a:fld>
             <a:endParaRPr lang="en-US"/>
           </a:p>
@@ -1382,7 +1383,7 @@
           <a:p>
             <a:fld id="{A78A0D41-72A1-4697-8545-F47A102596EA}" type="datetimeFigureOut">
               <a:rPr lang="en-US" smtClean="0"/>
-              <a:t>6/19/2026</a:t>
+              <a:t>6/24/2026</a:t>
             </a:fld>
             <a:endParaRPr lang="en-US"/>
           </a:p>
@@ -2005,7 +2006,7 @@
           <a:p>
             <a:fld id="{A78A0D41-72A1-4697-8545-F47A102596EA}" type="datetimeFigureOut">
               <a:rPr lang="en-US" smtClean="0"/>
-              <a:t>6/19/2026</a:t>
+              <a:t>6/24/2026</a:t>
             </a:fld>
             <a:endParaRPr lang="en-US"/>
           </a:p>
@@ -2865,7 +2866,7 @@
           <a:p>
             <a:fld id="{A78A0D41-72A1-4697-8545-F47A102596EA}" type="datetimeFigureOut">
               <a:rPr lang="en-US" smtClean="0"/>
-              <a:t>6/19/2026</a:t>
+              <a:t>6/24/2026</a:t>
             </a:fld>
             <a:endParaRPr lang="en-US"/>
           </a:p>
@@ -3035,7 +3036,7 @@
           <a:p>
             <a:fld id="{A78A0D41-72A1-4697-8545-F47A102596EA}" type="datetimeFigureOut">
               <a:rPr lang="en-US" smtClean="0"/>
-              <a:t>6/19/2026</a:t>
+              <a:t>6/24/2026</a:t>
             </a:fld>
             <a:endParaRPr lang="en-US"/>
           </a:p>
@@ -3215,7 +3216,7 @@
           <a:p>
             <a:fld id="{A78A0D41-72A1-4697-8545-F47A102596EA}" type="datetimeFigureOut">
               <a:rPr lang="en-US" smtClean="0"/>
-              <a:t>6/19/2026</a:t>
+              <a:t>6/24/2026</a:t>
             </a:fld>
             <a:endParaRPr lang="en-US"/>
           </a:p>
@@ -3401,7 +3402,7 @@
           <a:p>
             <a:fld id="{A78A0D41-72A1-4697-8545-F47A102596EA}" type="datetimeFigureOut">
               <a:rPr lang="en-US" smtClean="0"/>
-              <a:t>6/19/2026</a:t>
+              <a:t>6/24/2026</a:t>
             </a:fld>
             <a:endParaRPr lang="en-US"/>
           </a:p>
@@ -3583,7 +3584,7 @@
           <a:p>
             <a:fld id="{A78A0D41-72A1-4697-8545-F47A102596EA}" type="datetimeFigureOut">
               <a:rPr lang="en-US" smtClean="0"/>
-              <a:t>6/19/2026</a:t>
+              <a:t>6/24/2026</a:t>
             </a:fld>
             <a:endParaRPr lang="en-US"/>
           </a:p>
@@ -3830,7 +3831,7 @@
           <a:p>
             <a:fld id="{A78A0D41-72A1-4697-8545-F47A102596EA}" type="datetimeFigureOut">
               <a:rPr lang="en-US" smtClean="0"/>
-              <a:t>6/19/2026</a:t>
+              <a:t>6/24/2026</a:t>
             </a:fld>
             <a:endParaRPr lang="en-US"/>
           </a:p>
@@ -4122,7 +4123,7 @@
           <a:p>
             <a:fld id="{A78A0D41-72A1-4697-8545-F47A102596EA}" type="datetimeFigureOut">
               <a:rPr lang="en-US" smtClean="0"/>
-              <a:t>6/19/2026</a:t>
+              <a:t>6/24/2026</a:t>
             </a:fld>
             <a:endParaRPr lang="en-US"/>
           </a:p>
@@ -4566,7 +4567,7 @@
           <a:p>
             <a:fld id="{A78A0D41-72A1-4697-8545-F47A102596EA}" type="datetimeFigureOut">
               <a:rPr lang="en-US" smtClean="0"/>
-              <a:t>6/19/2026</a:t>
+              <a:t>6/24/2026</a:t>
             </a:fld>
             <a:endParaRPr lang="en-US"/>
           </a:p>
@@ -4684,7 +4685,7 @@
           <a:p>
             <a:fld id="{A78A0D41-72A1-4697-8545-F47A102596EA}" type="datetimeFigureOut">
               <a:rPr lang="en-US" smtClean="0"/>
-              <a:t>6/19/2026</a:t>
+              <a:t>6/24/2026</a:t>
             </a:fld>
             <a:endParaRPr lang="en-US"/>
           </a:p>
@@ -4779,7 +4780,7 @@
           <a:p>
             <a:fld id="{A78A0D41-72A1-4697-8545-F47A102596EA}" type="datetimeFigureOut">
               <a:rPr lang="en-US" smtClean="0"/>
-              <a:t>6/19/2026</a:t>
+              <a:t>6/24/2026</a:t>
             </a:fld>
             <a:endParaRPr lang="en-US"/>
           </a:p>
@@ -5058,7 +5059,7 @@
           <a:p>
             <a:fld id="{A78A0D41-72A1-4697-8545-F47A102596EA}" type="datetimeFigureOut">
               <a:rPr lang="en-US" smtClean="0"/>
-              <a:t>6/19/2026</a:t>
+              <a:t>6/24/2026</a:t>
             </a:fld>
             <a:endParaRPr lang="en-US"/>
           </a:p>
@@ -5333,7 +5334,7 @@
           <a:p>
             <a:fld id="{A78A0D41-72A1-4697-8545-F47A102596EA}" type="datetimeFigureOut">
               <a:rPr lang="en-US" smtClean="0"/>
-              <a:t>6/19/2026</a:t>
+              <a:t>6/24/2026</a:t>
             </a:fld>
             <a:endParaRPr lang="en-US"/>
           </a:p>
@@ -5536,6 +5537,13 @@
             <a:schemeClr val="lt1"/>
           </a:fontRef>
         </p:style>
+        <p:txBody>
+          <a:bodyPr/>
+          <a:lstStyle/>
+          <a:p>
+            <a:endParaRPr lang="en-US"/>
+          </a:p>
+        </p:txBody>
       </p:sp>
       <p:pic>
         <p:nvPicPr>
@@ -5630,6 +5638,13 @@
             <a:schemeClr val="lt1"/>
           </a:fontRef>
         </p:style>
+        <p:txBody>
+          <a:bodyPr/>
+          <a:lstStyle/>
+          <a:p>
+            <a:endParaRPr lang="en-US"/>
+          </a:p>
+        </p:txBody>
       </p:sp>
       <p:sp>
         <p:nvSpPr>
@@ -5762,7 +5777,7 @@
           <a:p>
             <a:fld id="{A78A0D41-72A1-4697-8545-F47A102596EA}" type="datetimeFigureOut">
               <a:rPr lang="en-US" smtClean="0"/>
-              <a:t>6/19/2026</a:t>
+              <a:t>6/24/2026</a:t>
             </a:fld>
             <a:endParaRPr lang="en-US"/>
           </a:p>
@@ -6599,6 +6614,272 @@
 </p:sld>
 </file>
 
+<file path=ppt/slides/slide3.xml><?xml version="1.0" encoding="utf-8"?>
+<p:sld xmlns:a="http://schemas.openxmlformats.org/drawingml/2006/main" xmlns:r="http://schemas.openxmlformats.org/officeDocument/2006/relationships" xmlns:p="http://schemas.openxmlformats.org/presentationml/2006/main">
+  <p:cSld>
+    <p:spTree>
+      <p:nvGrpSpPr>
+        <p:cNvPr id="1" name=""/>
+        <p:cNvGrpSpPr/>
+        <p:nvPr/>
+      </p:nvGrpSpPr>
+      <p:grpSpPr>
+        <a:xfrm>
+          <a:off x="0" y="0"/>
+          <a:ext cx="0" cy="0"/>
+          <a:chOff x="0" y="0"/>
+          <a:chExt cx="0" cy="0"/>
+        </a:xfrm>
+      </p:grpSpPr>
+      <p:sp>
+        <p:nvSpPr>
+          <p:cNvPr id="2" name="literal-accent1">
+            <a:extLst>
+              <a:ext uri="{FF2B5EF4-FFF2-40B4-BE49-F238E27FC236}">
+                <a16:creationId xmlns:a16="http://schemas.microsoft.com/office/drawing/2014/main" id="{F3902009-A630-E39E-136A-25A5F9B6B434}"/>
+              </a:ext>
+            </a:extLst>
+          </p:cNvPr>
+          <p:cNvSpPr/>
+          <p:nvPr/>
+        </p:nvSpPr>
+        <p:spPr>
+          <a:xfrm>
+            <a:off x="762000" y="762000"/>
+            <a:ext cx="2540000" cy="1524000"/>
+          </a:xfrm>
+          <a:prstGeom prst="rect">
+            <a:avLst/>
+          </a:prstGeom>
+          <a:solidFill>
+            <a:srgbClr val="B01513"/>
+          </a:solidFill>
+          <a:ln w="19050" cap="rnd" cmpd="sng" algn="ctr">
+            <a:noFill/>
+            <a:prstDash val="solid"/>
+          </a:ln>
+          <a:effectLst/>
+          <a:extLst>
+            <a:ext uri="{91240B29-F687-4F45-9708-019B960494DF}">
+              <a14:hiddenLine xmlns:a14="http://schemas.microsoft.com/office/drawing/2010/main" w="19050" cap="rnd" cmpd="sng" algn="ctr">
+                <a:solidFill>
+                  <a:schemeClr val="accent1">
+                    <a:shade val="15000"/>
+                  </a:schemeClr>
+                </a:solidFill>
+                <a:prstDash val="solid"/>
+              </a14:hiddenLine>
+            </a:ext>
+          </a:extLst>
+        </p:spPr>
+        <p:style>
+          <a:lnRef idx="2">
+            <a:schemeClr val="accent1">
+              <a:shade val="15000"/>
+            </a:schemeClr>
+          </a:lnRef>
+          <a:fillRef idx="1">
+            <a:schemeClr val="accent1"/>
+          </a:fillRef>
+          <a:effectRef idx="0">
+            <a:schemeClr val="accent1"/>
+          </a:effectRef>
+          <a:fontRef idx="minor">
+            <a:schemeClr val="lt1"/>
+          </a:fontRef>
+        </p:style>
+        <p:txBody>
+          <a:bodyPr rtlCol="0" anchor="ctr"/>
+          <a:lstStyle/>
+          <a:p>
+            <a:pPr algn="ctr"/>
+            <a:endParaRPr lang="en-US"/>
+          </a:p>
+        </p:txBody>
+      </p:sp>
+      <p:sp>
+        <p:nvSpPr>
+          <p:cNvPr id="3" name="literal-nonaccent">
+            <a:extLst>
+              <a:ext uri="{FF2B5EF4-FFF2-40B4-BE49-F238E27FC236}">
+                <a16:creationId xmlns:a16="http://schemas.microsoft.com/office/drawing/2014/main" id="{F5F3342F-8BF6-66A7-4D4C-F7C0BF14238E}"/>
+              </a:ext>
+            </a:extLst>
+          </p:cNvPr>
+          <p:cNvSpPr/>
+          <p:nvPr/>
+        </p:nvSpPr>
+        <p:spPr>
+          <a:xfrm>
+            <a:off x="3810000" y="762000"/>
+            <a:ext cx="2540000" cy="1524000"/>
+          </a:xfrm>
+          <a:prstGeom prst="rect">
+            <a:avLst/>
+          </a:prstGeom>
+          <a:solidFill>
+            <a:srgbClr val="123456"/>
+          </a:solidFill>
+          <a:ln w="19050" cap="rnd" cmpd="sng" algn="ctr">
+            <a:noFill/>
+            <a:prstDash val="solid"/>
+          </a:ln>
+          <a:effectLst/>
+          <a:extLst>
+            <a:ext uri="{91240B29-F687-4F45-9708-019B960494DF}">
+              <a14:hiddenLine xmlns:a14="http://schemas.microsoft.com/office/drawing/2010/main" w="19050" cap="rnd" cmpd="sng" algn="ctr">
+                <a:solidFill>
+                  <a:schemeClr val="accent1">
+                    <a:shade val="15000"/>
+                  </a:schemeClr>
+                </a:solidFill>
+                <a:prstDash val="solid"/>
+              </a14:hiddenLine>
+            </a:ext>
+          </a:extLst>
+        </p:spPr>
+        <p:style>
+          <a:lnRef idx="2">
+            <a:schemeClr val="accent1">
+              <a:shade val="15000"/>
+            </a:schemeClr>
+          </a:lnRef>
+          <a:fillRef idx="1">
+            <a:schemeClr val="accent1"/>
+          </a:fillRef>
+          <a:effectRef idx="0">
+            <a:schemeClr val="accent1"/>
+          </a:effectRef>
+          <a:fontRef idx="minor">
+            <a:schemeClr val="lt1"/>
+          </a:fontRef>
+        </p:style>
+        <p:txBody>
+          <a:bodyPr rtlCol="0" anchor="ctr"/>
+          <a:lstStyle/>
+          <a:p>
+            <a:pPr algn="ctr"/>
+            <a:endParaRPr lang="en-US"/>
+          </a:p>
+        </p:txBody>
+      </p:sp>
+      <p:graphicFrame>
+        <p:nvGraphicFramePr>
+          <p:cNvPr id="4" name="styled-table">
+            <a:extLst>
+              <a:ext uri="{FF2B5EF4-FFF2-40B4-BE49-F238E27FC236}">
+                <a16:creationId xmlns:a16="http://schemas.microsoft.com/office/drawing/2014/main" id="{ECB4B6A9-F4A8-2576-8CC6-E09ECC8DD08B}"/>
+              </a:ext>
+            </a:extLst>
+          </p:cNvPr>
+          <p:cNvGraphicFramePr>
+            <a:graphicFrameLocks noGrp="1"/>
+          </p:cNvGraphicFramePr>
+          <p:nvPr>
+            <p:extLst>
+              <p:ext uri="{D42A27DB-BD31-4B8C-83A1-F6EECF244321}">
+                <p14:modId xmlns:p14="http://schemas.microsoft.com/office/powerpoint/2010/main" val="742995385"/>
+              </p:ext>
+            </p:extLst>
+          </p:nvPr>
+        </p:nvGraphicFramePr>
+        <p:xfrm>
+          <a:off x="762000" y="3048000"/>
+          <a:ext cx="5080000" cy="2032000"/>
+        </p:xfrm>
+        <a:graphic>
+          <a:graphicData uri="http://schemas.openxmlformats.org/drawingml/2006/table">
+            <a:tbl>
+              <a:tblPr firstRow="1" bandRow="1">
+                <a:tableStyleId>{5C22544A-7EE6-4342-B048-85BDC9FD1C3A}</a:tableStyleId>
+              </a:tblPr>
+              <a:tblGrid>
+                <a:gridCol w="2540000">
+                  <a:extLst>
+                    <a:ext uri="{9D8B030D-6E8A-4147-A177-3AD203B41FA5}">
+                      <a16:colId xmlns:a16="http://schemas.microsoft.com/office/drawing/2014/main" val="567320374"/>
+                    </a:ext>
+                  </a:extLst>
+                </a:gridCol>
+                <a:gridCol w="2540000">
+                  <a:extLst>
+                    <a:ext uri="{9D8B030D-6E8A-4147-A177-3AD203B41FA5}">
+                      <a16:colId xmlns:a16="http://schemas.microsoft.com/office/drawing/2014/main" val="1217359443"/>
+                    </a:ext>
+                  </a:extLst>
+                </a:gridCol>
+              </a:tblGrid>
+              <a:tr h="1016000">
+                <a:tc>
+                  <a:txBody>
+                    <a:bodyPr/>
+                    <a:lstStyle/>
+                    <a:p>
+                      <a:endParaRPr lang="en-US"/>
+                    </a:p>
+                  </a:txBody>
+                  <a:tcPr/>
+                </a:tc>
+                <a:tc>
+                  <a:txBody>
+                    <a:bodyPr/>
+                    <a:lstStyle/>
+                    <a:p>
+                      <a:endParaRPr lang="en-US"/>
+                    </a:p>
+                  </a:txBody>
+                  <a:tcPr/>
+                </a:tc>
+                <a:extLst>
+                  <a:ext uri="{0D108BD9-81ED-4DB2-BD59-A6C34878D82A}">
+                    <a16:rowId xmlns:a16="http://schemas.microsoft.com/office/drawing/2014/main" val="2446945781"/>
+                  </a:ext>
+                </a:extLst>
+              </a:tr>
+              <a:tr h="1016000">
+                <a:tc>
+                  <a:txBody>
+                    <a:bodyPr/>
+                    <a:lstStyle/>
+                    <a:p>
+                      <a:endParaRPr lang="en-US"/>
+                    </a:p>
+                  </a:txBody>
+                  <a:tcPr/>
+                </a:tc>
+                <a:tc>
+                  <a:txBody>
+                    <a:bodyPr/>
+                    <a:lstStyle/>
+                    <a:p>
+                      <a:endParaRPr lang="en-US"/>
+                    </a:p>
+                  </a:txBody>
+                  <a:tcPr/>
+                </a:tc>
+                <a:extLst>
+                  <a:ext uri="{0D108BD9-81ED-4DB2-BD59-A6C34878D82A}">
+                    <a16:rowId xmlns:a16="http://schemas.microsoft.com/office/drawing/2014/main" val="1464757624"/>
+                  </a:ext>
+                </a:extLst>
+              </a:tr>
+            </a:tbl>
+          </a:graphicData>
+        </a:graphic>
+      </p:graphicFrame>
+    </p:spTree>
+    <p:extLst>
+      <p:ext uri="{BB962C8B-B14F-4D97-AF65-F5344CB8AC3E}">
+        <p14:creationId xmlns:p14="http://schemas.microsoft.com/office/powerpoint/2010/main" val="952469077"/>
+      </p:ext>
+    </p:extLst>
+  </p:cSld>
+  <p:clrMapOvr>
+    <a:masterClrMapping/>
+  </p:clrMapOvr>
+</p:sld>
+</file>
+
 <file path=ppt/theme/theme1.xml><?xml version="1.0" encoding="utf-8"?>
 <a:theme xmlns:a="http://schemas.openxmlformats.org/drawingml/2006/main" name="Ion">
   <a:themeElements>
